--- a/Europavergleich_Präsentation_Überarbeitet.pptx
+++ b/Europavergleich_Präsentation_Überarbeitet.pptx
@@ -3058,24 +3058,7 @@
                 </a:solidFill>
                 <a:latin typeface="Calibri" pitchFamily="34" charset="0"/>
               </a:rPr>
-              <a:t>Stark bei komplexen Refactorings</a:t>
-            </a:r>
-          </a:p>
-          <a:p>
-            <a:pPr marL="0" indent="0" algn="l">
-              <a:spcBef>
-                <a:spcPts val="400"/>
-              </a:spcBef>
-              <a:buNone/>
-            </a:pPr>
-            <a:r>
-              <a:rPr lang="de-DE" sz="1200" b="1" dirty="0">
-                <a:solidFill>
-                  <a:srgbClr val="FFFFFF"/>
-                </a:solidFill>
-                <a:latin typeface="Calibri" pitchFamily="34" charset="0"/>
-              </a:rPr>
-              <a:t>Nachteile</a:t>
+              <a:t>Direkter Zugriff auf Ordner und Projekten auf dem Desktop</a:t>
             </a:r>
           </a:p>
           <a:p>
@@ -3093,7 +3076,24 @@
                 </a:solidFill>
                 <a:latin typeface="Calibri" pitchFamily="34" charset="0"/>
               </a:rPr>
-              <a:t>Nutzungslimits bremsen mitunter</a:t>
+              <a:t>Gute Erinnerung</a:t>
+            </a:r>
+          </a:p>
+          <a:p>
+            <a:pPr marL="0" indent="0" algn="l">
+              <a:spcBef>
+                <a:spcPts val="400"/>
+              </a:spcBef>
+              <a:buNone/>
+            </a:pPr>
+            <a:r>
+              <a:rPr lang="de-DE" sz="1200" b="1" dirty="0">
+                <a:solidFill>
+                  <a:srgbClr val="FFFFFF"/>
+                </a:solidFill>
+                <a:latin typeface="Calibri" pitchFamily="34" charset="0"/>
+              </a:rPr>
+              <a:t>Nachteile</a:t>
             </a:r>
           </a:p>
           <a:p>
@@ -3111,7 +3111,25 @@
                 </a:solidFill>
                 <a:latin typeface="Calibri" pitchFamily="34" charset="0"/>
               </a:rPr>
-              <a:t>Langsamer bei Großaufgaben</a:t>
+              <a:t>Nutzungslimits bremsen</a:t>
+            </a:r>
+          </a:p>
+          <a:p>
+            <a:pPr marL="171450" indent="-171450" algn="l">
+              <a:lnSpc>
+                <a:spcPts val="1350"/>
+              </a:lnSpc>
+              <a:buFont typeface="Arial"/>
+              <a:buChar char="•"/>
+            </a:pPr>
+            <a:r>
+              <a:rPr lang="de-DE" sz="1100" dirty="0">
+                <a:solidFill>
+                  <a:srgbClr val="FFFFFF"/>
+                </a:solidFill>
+                <a:latin typeface="Calibri" pitchFamily="34" charset="0"/>
+              </a:rPr>
+              <a:t>Langsamer bei Großaufgaben (teils 20 Min)</a:t>
             </a:r>
           </a:p>
         </p:txBody>
@@ -3130,7 +3148,7 @@
         </p:nvSpPr>
         <p:spPr>
           <a:xfrm>
-            <a:off x="4762500" y="1193800"/>
+            <a:off x="4714240" y="1186180"/>
             <a:ext cx="4064000" cy="3454400"/>
           </a:xfrm>
           <a:prstGeom prst="roundRect">
@@ -3281,7 +3299,7 @@
                 </a:solidFill>
                 <a:latin typeface="Calibri" pitchFamily="34" charset="0"/>
               </a:rPr>
-              <a:t>Nahtlos im OpenAI-Workflow</a:t>
+              <a:t>Guter Zugriff auf GitHub</a:t>
             </a:r>
           </a:p>
           <a:p>
@@ -3300,6 +3318,42 @@
                 <a:latin typeface="Calibri" pitchFamily="34" charset="0"/>
               </a:rPr>
               <a:t>Stark bei klar umrissenen Tasks</a:t>
+            </a:r>
+          </a:p>
+          <a:p>
+            <a:pPr marL="171450" indent="-171450" algn="l">
+              <a:lnSpc>
+                <a:spcPts val="1350"/>
+              </a:lnSpc>
+              <a:buFont typeface="Arial"/>
+              <a:buChar char="•"/>
+            </a:pPr>
+            <a:r>
+              <a:rPr lang="de-DE" sz="1100" dirty="0">
+                <a:solidFill>
+                  <a:srgbClr val="FFFFFF"/>
+                </a:solidFill>
+                <a:latin typeface="Calibri" pitchFamily="34" charset="0"/>
+              </a:rPr>
+              <a:t>Übersichtliche App</a:t>
+            </a:r>
+          </a:p>
+          <a:p>
+            <a:pPr marL="171450" indent="-171450" algn="l">
+              <a:lnSpc>
+                <a:spcPts val="1350"/>
+              </a:lnSpc>
+              <a:buFont typeface="Arial"/>
+              <a:buChar char="•"/>
+            </a:pPr>
+            <a:r>
+              <a:rPr lang="de-DE" sz="1100" dirty="0">
+                <a:solidFill>
+                  <a:srgbClr val="FFFFFF"/>
+                </a:solidFill>
+                <a:latin typeface="Calibri" pitchFamily="34" charset="0"/>
+              </a:rPr>
+              <a:t>Länger Nutzung möglich</a:t>
             </a:r>
           </a:p>
           <a:p>
